--- a/Voting_Classifiers/Voting_Classifiers.pptx
+++ b/Voting_Classifiers/Voting_Classifiers.pptx
@@ -109,6 +109,11 @@
       </a:defRPr>
     </a:lvl9pPr>
   </p:defaultTextStyle>
+  <p:extLst>
+    <p:ext uri="{EFAFB233-063F-42B5-8137-9DF3F51BA10A}">
+      <p15:sldGuideLst xmlns:p15="http://schemas.microsoft.com/office/powerpoint/2012/main"/>
+    </p:ext>
+  </p:extLst>
 </p:presentation>
 </file>
 
@@ -261,7 +266,7 @@
           <a:p>
             <a:fld id="{DD7896AB-4C1A-49B7-B49C-556BB58C9EDA}" type="datetimeFigureOut">
               <a:rPr lang="en-IN" smtClean="0"/>
-              <a:t>14-04-2026</a:t>
+              <a:t>16-04-2026</a:t>
             </a:fld>
             <a:endParaRPr lang="en-IN"/>
           </a:p>
@@ -461,7 +466,7 @@
           <a:p>
             <a:fld id="{DD7896AB-4C1A-49B7-B49C-556BB58C9EDA}" type="datetimeFigureOut">
               <a:rPr lang="en-IN" smtClean="0"/>
-              <a:t>14-04-2026</a:t>
+              <a:t>16-04-2026</a:t>
             </a:fld>
             <a:endParaRPr lang="en-IN"/>
           </a:p>
@@ -671,7 +676,7 @@
           <a:p>
             <a:fld id="{DD7896AB-4C1A-49B7-B49C-556BB58C9EDA}" type="datetimeFigureOut">
               <a:rPr lang="en-IN" smtClean="0"/>
-              <a:t>14-04-2026</a:t>
+              <a:t>16-04-2026</a:t>
             </a:fld>
             <a:endParaRPr lang="en-IN"/>
           </a:p>
@@ -871,7 +876,7 @@
           <a:p>
             <a:fld id="{DD7896AB-4C1A-49B7-B49C-556BB58C9EDA}" type="datetimeFigureOut">
               <a:rPr lang="en-IN" smtClean="0"/>
-              <a:t>14-04-2026</a:t>
+              <a:t>16-04-2026</a:t>
             </a:fld>
             <a:endParaRPr lang="en-IN"/>
           </a:p>
@@ -1147,7 +1152,7 @@
           <a:p>
             <a:fld id="{DD7896AB-4C1A-49B7-B49C-556BB58C9EDA}" type="datetimeFigureOut">
               <a:rPr lang="en-IN" smtClean="0"/>
-              <a:t>14-04-2026</a:t>
+              <a:t>16-04-2026</a:t>
             </a:fld>
             <a:endParaRPr lang="en-IN"/>
           </a:p>
@@ -1415,7 +1420,7 @@
           <a:p>
             <a:fld id="{DD7896AB-4C1A-49B7-B49C-556BB58C9EDA}" type="datetimeFigureOut">
               <a:rPr lang="en-IN" smtClean="0"/>
-              <a:t>14-04-2026</a:t>
+              <a:t>16-04-2026</a:t>
             </a:fld>
             <a:endParaRPr lang="en-IN"/>
           </a:p>
@@ -1830,7 +1835,7 @@
           <a:p>
             <a:fld id="{DD7896AB-4C1A-49B7-B49C-556BB58C9EDA}" type="datetimeFigureOut">
               <a:rPr lang="en-IN" smtClean="0"/>
-              <a:t>14-04-2026</a:t>
+              <a:t>16-04-2026</a:t>
             </a:fld>
             <a:endParaRPr lang="en-IN"/>
           </a:p>
@@ -1972,7 +1977,7 @@
           <a:p>
             <a:fld id="{DD7896AB-4C1A-49B7-B49C-556BB58C9EDA}" type="datetimeFigureOut">
               <a:rPr lang="en-IN" smtClean="0"/>
-              <a:t>14-04-2026</a:t>
+              <a:t>16-04-2026</a:t>
             </a:fld>
             <a:endParaRPr lang="en-IN"/>
           </a:p>
@@ -2085,7 +2090,7 @@
           <a:p>
             <a:fld id="{DD7896AB-4C1A-49B7-B49C-556BB58C9EDA}" type="datetimeFigureOut">
               <a:rPr lang="en-IN" smtClean="0"/>
-              <a:t>14-04-2026</a:t>
+              <a:t>16-04-2026</a:t>
             </a:fld>
             <a:endParaRPr lang="en-IN"/>
           </a:p>
@@ -2398,7 +2403,7 @@
           <a:p>
             <a:fld id="{DD7896AB-4C1A-49B7-B49C-556BB58C9EDA}" type="datetimeFigureOut">
               <a:rPr lang="en-IN" smtClean="0"/>
-              <a:t>14-04-2026</a:t>
+              <a:t>16-04-2026</a:t>
             </a:fld>
             <a:endParaRPr lang="en-IN"/>
           </a:p>
@@ -2687,7 +2692,7 @@
           <a:p>
             <a:fld id="{DD7896AB-4C1A-49B7-B49C-556BB58C9EDA}" type="datetimeFigureOut">
               <a:rPr lang="en-IN" smtClean="0"/>
-              <a:t>14-04-2026</a:t>
+              <a:t>16-04-2026</a:t>
             </a:fld>
             <a:endParaRPr lang="en-IN"/>
           </a:p>
@@ -2930,7 +2935,7 @@
           <a:p>
             <a:fld id="{DD7896AB-4C1A-49B7-B49C-556BB58C9EDA}" type="datetimeFigureOut">
               <a:rPr lang="en-IN" smtClean="0"/>
-              <a:t>14-04-2026</a:t>
+              <a:t>16-04-2026</a:t>
             </a:fld>
             <a:endParaRPr lang="en-IN"/>
           </a:p>
@@ -3587,8 +3592,8 @@
         </p:nvSpPr>
         <p:spPr>
           <a:xfrm>
-            <a:off x="3046751" y="1239077"/>
-            <a:ext cx="6093500" cy="4372351"/>
+            <a:off x="287078" y="340243"/>
+            <a:ext cx="11483163" cy="2833468"/>
           </a:xfrm>
           <a:prstGeom prst="rect">
             <a:avLst/>
@@ -3889,7 +3894,7 @@
                 <a:effectLst/>
                 <a:latin typeface="source-serif-pro"/>
               </a:rPr>
-              <a:t>Consider three models M1,M2,M3M_1, M_2, M_3 predicting a binary classification problem (Class 0 or Class 1). The votes are:</a:t>
+              <a:t>Consider three models M1,M2,M3 M_1, M_2, M_3 predicting a binary classification problem (Class 0 or Class 1). The votes are:</a:t>
             </a:r>
           </a:p>
           <a:p>
@@ -3907,7 +3912,7 @@
                 <a:effectLst/>
                 <a:latin typeface="source-serif-pro"/>
               </a:rPr>
-              <a:t>M1=0,M2=1,M3=0M_1 = 0, \quad M_2 = 1, \quad M_3 = 0</a:t>
+              <a:t>M1=0,M2=1,M3=0 M_1 = 0, \quad M_2 = 1, \quad M_3 = 0</a:t>
             </a:r>
           </a:p>
           <a:p>
@@ -4031,7 +4036,7 @@
         <p:spPr>
           <a:xfrm>
             <a:off x="5520128" y="4106428"/>
-            <a:ext cx="6093500" cy="646331"/>
+            <a:ext cx="6093500" cy="369332"/>
           </a:xfrm>
           <a:prstGeom prst="rect">
             <a:avLst/>
@@ -4052,7 +4057,7 @@
                 <a:effectLst/>
                 <a:latin typeface="source-serif-pro"/>
               </a:rPr>
-              <a:t>If P(0)&gt;P(1)P(0) &gt; P(1), predict Class 0, otherwise predict Class 1.</a:t>
+              <a:t>If P(0)&gt;P(1), predict Class 0, otherwise predict Class 1.</a:t>
             </a:r>
             <a:endParaRPr lang="en-IN" dirty="0"/>
           </a:p>
@@ -4103,7 +4108,7 @@
         <p:spPr>
           <a:xfrm>
             <a:off x="299803" y="1004341"/>
-            <a:ext cx="10972800" cy="5323259"/>
+            <a:ext cx="10972800" cy="5280997"/>
           </a:xfrm>
           <a:prstGeom prst="rect">
             <a:avLst/>
@@ -4417,18 +4422,36 @@
               <a:buChar char="•"/>
             </a:pPr>
             <a:r>
-              <a:rPr lang="en-US" b="0" i="0" dirty="0">
+              <a:rPr lang="en-US" b="0" i="0" dirty="0" err="1">
                 <a:solidFill>
                   <a:srgbClr val="242424"/>
                 </a:solidFill>
                 <a:effectLst/>
                 <a:latin typeface="source-serif-pro"/>
               </a:rPr>
-              <a:t>Implemented them in Python.</a:t>
-            </a:r>
-          </a:p>
-          <a:p>
-            <a:pPr algn="l">
+              <a:t>w</a:t>
+            </a:r>
+            <a:r>
+              <a:rPr lang="en-US" dirty="0" err="1">
+                <a:solidFill>
+                  <a:srgbClr val="242424"/>
+                </a:solidFill>
+                <a:latin typeface="source-serif-pro"/>
+              </a:rPr>
+              <a:t>Implemented</a:t>
+            </a:r>
+            <a:r>
+              <a:rPr lang="en-US" dirty="0">
+                <a:solidFill>
+                  <a:srgbClr val="242424"/>
+                </a:solidFill>
+                <a:latin typeface="source-serif-pro"/>
+              </a:rPr>
+              <a:t> them in Python.</a:t>
+            </a:r>
+          </a:p>
+          <a:p>
+            <a:pPr>
               <a:lnSpc>
                 <a:spcPts val="2400"/>
               </a:lnSpc>
@@ -4436,6 +4459,25 @@
               <a:buChar char="•"/>
             </a:pPr>
             <a:r>
+              <a:rPr lang="en-US" dirty="0">
+                <a:solidFill>
+                  <a:srgbClr val="242424"/>
+                </a:solidFill>
+                <a:latin typeface="source-serif-pro"/>
+              </a:rPr>
+              <a:t>Compared their performance </a:t>
+            </a:r>
+            <a:r>
+              <a:rPr lang="en-US" b="0" i="0" dirty="0" err="1">
+                <a:solidFill>
+                  <a:srgbClr val="242424"/>
+                </a:solidFill>
+                <a:effectLst/>
+                <a:latin typeface="source-serif-pro"/>
+              </a:rPr>
+              <a:t>ith</a:t>
+            </a:r>
+            <a:r>
               <a:rPr lang="en-US" b="0" i="0" dirty="0">
                 <a:solidFill>
                   <a:srgbClr val="242424"/>
@@ -4443,7 +4485,7 @@
                 <a:effectLst/>
                 <a:latin typeface="source-serif-pro"/>
               </a:rPr>
-              <a:t>Compared their performance with individual models.</a:t>
+              <a:t> individual models.</a:t>
             </a:r>
           </a:p>
           <a:p>
